--- a/docs/PitchDeck.pptx
+++ b/docs/PitchDeck.pptx
@@ -3015,7 +3015,7 @@
                 <a:ea typeface="Malgun Gothic" pitchFamily="34" charset="-122"/>
                 <a:cs typeface="Malgun Gothic" pitchFamily="34" charset="-120"/>
               </a:rPr>
-              <a:t>모델은 갈아 끼울 수 있다 — </a:t>
+              <a:t>한도에 걸려도 멈추지 않는다 — </a:t>
             </a:r>
             <a:pPr indent="0" marL="0">
               <a:lnSpc>
@@ -3032,7 +3032,7 @@
                 <a:ea typeface="Malgun Gothic" pitchFamily="34" charset="-122"/>
                 <a:cs typeface="Malgun Gothic" pitchFamily="34" charset="-120"/>
               </a:rPr>
-              <a:t>지금 붙어 있는 것은 OpenAI. Gemini와 같은 payload·같은 반환 JSON 계약을 써서, 개발 중 실제로 한 번 갈아 끼웠고 바뀐 코드는 판정표 한 곳뿐이었다.</a:t>
+              <a:t>지금은 OpenAI. 한도에 걸리면 Gemini → gpt-4.1로 자동으로 넘어간다. 같은 payload·같은 반환 계약을 쓰기 때문이고, 어느 쪽이 답했는지는 응답에 남는다.</a:t>
             </a:r>
             <a:endParaRPr lang="en-US" sz="1250" dirty="0"/>
           </a:p>
@@ -3414,7 +3414,7 @@
                 <a:ea typeface="Malgun Gothic" pitchFamily="34" charset="-122"/>
                 <a:cs typeface="Malgun Gothic" pitchFamily="34" charset="-120"/>
               </a:rPr>
-              <a:t>741</a:t>
+              <a:t>773</a:t>
             </a:r>
             <a:endParaRPr lang="en-US" sz="4000" dirty="0"/>
           </a:p>
@@ -4369,7 +4369,7 @@
                 <a:ea typeface="Malgun Gothic" pitchFamily="34" charset="-122"/>
                 <a:cs typeface="Malgun Gothic" pitchFamily="34" charset="-120"/>
               </a:rPr>
-              <a:t>최종 실확장 검증</a:t>
+              <a:t>시연 촬영 · 회귀</a:t>
             </a:r>
             <a:endParaRPr lang="en-US" sz="1600" dirty="0"/>
           </a:p>
@@ -4411,7 +4411,7 @@
                 <a:ea typeface="Malgun Gothic" pitchFamily="34" charset="-122"/>
                 <a:cs typeface="Malgun Gothic" pitchFamily="34" charset="-120"/>
               </a:rPr>
-              <a:t>회귀 20건 재실측 포함. 시연 영상이 그 증거가 된다</a:t>
+              <a:t>실확장 확인은 8/20에 했다. 화면은 아직 한국어뿐이다</a:t>
             </a:r>
             <a:endParaRPr lang="en-US" sz="1150" dirty="0"/>
           </a:p>

--- a/docs/PitchDeck.pptx
+++ b/docs/PitchDeck.pptx
@@ -3700,7 +3700,7 @@
                 <a:ea typeface="Malgun Gothic" pitchFamily="34" charset="-122"/>
                 <a:cs typeface="Malgun Gothic" pitchFamily="34" charset="-120"/>
               </a:rPr>
-              <a:t>38 / 52</a:t>
+              <a:t>48 / 52</a:t>
             </a:r>
             <a:endParaRPr lang="en-US" sz="4000" dirty="0"/>
           </a:p>
@@ -3742,7 +3742,7 @@
                 <a:ea typeface="Malgun Gothic" pitchFamily="34" charset="-122"/>
                 <a:cs typeface="Malgun Gothic" pitchFamily="34" charset="-120"/>
               </a:rPr>
-              <a:t>태스크 구현·배포 완료</a:t>
+              <a:t>태스크 구현 완료</a:t>
             </a:r>
             <a:endParaRPr lang="en-US" sz="1300" dirty="0"/>
           </a:p>
